--- a/Task2_delta_riga710.pptx
+++ b/Task2_delta_riga710.pptx
@@ -7592,7 +7592,7 @@
           <a:lstStyle/>
           <a:p>
             <a:r>
-              <a:t>Punto di partenza simulazione con LR = 3e-05</a:t>
+              <a:t>Punto di partenza simulazione con LR = 0.0003</a:t>
             </a:r>
           </a:p>
         </p:txBody>
@@ -7842,7 +7842,7 @@
         <p:spPr>
           <a:xfrm>
             <a:off x="914400" y="1005840"/>
-            <a:ext cx="10853766" cy="5394960"/>
+            <a:ext cx="10849205" cy="5394960"/>
           </a:xfrm>
           <a:prstGeom prst="rect">
             <a:avLst/>
@@ -7954,7 +7954,7 @@
           <a:p>
             <a:pPr/>
             <a:r>
-              <a:t>DOF_PITCH (*) = 0.140000 da 0.119155</a:t>
+              <a:t>DOF_PITCH (*) = 0.127379 da 0.119155</a:t>
             </a:r>
           </a:p>
           <a:p>
@@ -7966,7 +7966,7 @@
           <a:p>
             <a:pPr/>
             <a:r>
-              <a:t>DOF_BETA2 (*) = -67.652069 da -63.059689</a:t>
+              <a:t>DOF_BETA2 (*) = -63.769238 da -63.059689</a:t>
             </a:r>
           </a:p>
           <a:p>
@@ -7978,19 +7978,19 @@
           <a:p>
             <a:pPr/>
             <a:r>
-              <a:t>DOF_W2 (*) = 0.001000 da 0.590027</a:t>
+              <a:t>DOF_W2 (*) = 0.469422 da 0.590027</a:t>
             </a:r>
           </a:p>
           <a:p>
             <a:pPr/>
             <a:r>
-              <a:t>DOF_TMOVXU (*) = 0.005452 da 0.108462</a:t>
+              <a:t>DOF_TMOVXU (*) = 0.071397 da 0.108462</a:t>
             </a:r>
           </a:p>
           <a:p>
             <a:pPr/>
             <a:r>
-              <a:t>DOF_TMOVXL (*) = -0.144735 da 0.056210</a:t>
+              <a:t>DOF_TMOVXL (*) = -0.115496 da 0.056210</a:t>
             </a:r>
           </a:p>
         </p:txBody>
@@ -8018,91 +8018,91 @@
           <a:p>
             <a:pPr/>
             <a:r>
-              <a:t>OF_alfa_ex = -60.626270 da -60.444000</a:t>
+              <a:t>OF_alfa_ex = -59.893902 da -60.444000</a:t>
             </a:r>
           </a:p>
           <a:p>
             <a:pPr/>
             <a:r>
-              <a:t>OF_Cpt = 0.021874 da 0.022570</a:t>
+              <a:t>OF_Cpt = 0.021890 da 0.022570</a:t>
             </a:r>
           </a:p>
           <a:p>
             <a:pPr/>
             <a:r>
-              <a:t>OF_CSI = 0.020323 da 0.021070</a:t>
+              <a:t>OF_CSI = 0.020388 da 0.021070</a:t>
             </a:r>
           </a:p>
           <a:p>
             <a:pPr/>
             <a:r>
-              <a:t>OF_phi = 0.629002 da 0.630063</a:t>
+              <a:t>OF_phi = 0.644277 da 0.630063</a:t>
             </a:r>
           </a:p>
           <a:p>
             <a:pPr/>
             <a:r>
-              <a:t>OF_psi = 1.221337 da 1.222194</a:t>
+              <a:t>OF_psi = 1.226727 da 1.222194</a:t>
             </a:r>
           </a:p>
           <a:p>
             <a:pPr/>
             <a:r>
-              <a:t>OF_Zwi = 1.294372 da 1.128670</a:t>
+              <a:t>OF_Zwi = 1.198932 da 1.128670</a:t>
             </a:r>
           </a:p>
           <a:p>
             <a:pPr/>
             <a:r>
-              <a:t>OF_Zwc = 1.243497 da 1.078673</a:t>
+              <a:t>OF_Zwc = 1.154944 da 1.078673</a:t>
             </a:r>
           </a:p>
           <a:p>
             <a:pPr/>
             <a:r>
-              <a:t>OF_DFss_mis = 1.430297 da 1.314400</a:t>
+              <a:t>OF_DFss_mis = 1.354504 da 1.314400</a:t>
             </a:r>
           </a:p>
           <a:p>
             <a:pPr/>
             <a:r>
-              <a:t>OF_DFss_cp = 0.909757 da 0.931200</a:t>
+              <a:t>OF_DFss_cp = 0.924123 da 0.931200</a:t>
             </a:r>
           </a:p>
           <a:p>
             <a:pPr/>
             <a:r>
-              <a:t>OF_Mis_peak = 0.522181 da 0.501200</a:t>
+              <a:t>OF_Mis_peak = 0.508416 da 0.501200</a:t>
             </a:r>
           </a:p>
           <a:p>
             <a:pPr/>
             <a:r>
-              <a:t>OF_s_peak = 0.487687 da 0.484400</a:t>
+              <a:t>OF_s_peak = 0.477891 da 0.484400</a:t>
             </a:r>
           </a:p>
           <a:p>
             <a:pPr/>
             <a:r>
-              <a:t>OF_s_diff_dim = 0.077946 da 0.078650</a:t>
+              <a:t>OF_s_diff_dim = 0.078965 da 0.078650</a:t>
             </a:r>
           </a:p>
           <a:p>
             <a:pPr/>
             <a:r>
-              <a:t>OF_s_tot_SS = 0.156084 da 0.152500</a:t>
+              <a:t>OF_s_tot_SS = 0.152956 da 0.152500</a:t>
             </a:r>
           </a:p>
           <a:p>
             <a:pPr/>
             <a:r>
-              <a:t>OF_Tmax = 0.012103 da 0.012302</a:t>
+              <a:t>OF_Tmax = 0.012061 da 0.012302</a:t>
             </a:r>
           </a:p>
           <a:p>
             <a:pPr/>
             <a:r>
-              <a:t>OF_X_Tmax = 0.233882 da 0.296815</a:t>
+              <a:t>OF_X_Tmax = 0.260676 da 0.296815</a:t>
             </a:r>
           </a:p>
         </p:txBody>
